--- a/Schema.pptx
+++ b/Schema.pptx
@@ -116,26 +116,18 @@
 <file path=ppt/changesInfos/changesInfo1.xml><?xml version="1.0" encoding="utf-8"?>
 <pc:chgInfo xmlns:a="http://schemas.openxmlformats.org/drawingml/2006/main" xmlns:r="http://schemas.openxmlformats.org/officeDocument/2006/relationships" xmlns:ac="http://schemas.microsoft.com/office/drawing/2013/main/command" xmlns:pc="http://schemas.microsoft.com/office/powerpoint/2013/main/command">
   <pc:docChgLst>
-    <pc:chgData name="Antonio Cisternino" userId="ae5ff991-ed40-45cd-a3cc-046f9cb98081" providerId="ADAL" clId="{6FE36FCD-D04E-43A6-AA55-E1448BB1EDA6}"/>
+    <pc:chgData name="Antonio Cisternino" userId="ae5ff991-ed40-45cd-a3cc-046f9cb98081" providerId="ADAL" clId="{87B870CB-4B44-4065-800B-C8CFCDDC263F}"/>
     <pc:docChg chg="modSld">
-      <pc:chgData name="Antonio Cisternino" userId="ae5ff991-ed40-45cd-a3cc-046f9cb98081" providerId="ADAL" clId="{6FE36FCD-D04E-43A6-AA55-E1448BB1EDA6}" dt="2021-06-07T19:46:53.677" v="9" actId="20577"/>
+      <pc:chgData name="Antonio Cisternino" userId="ae5ff991-ed40-45cd-a3cc-046f9cb98081" providerId="ADAL" clId="{87B870CB-4B44-4065-800B-C8CFCDDC263F}" dt="2023-11-23T17:43:35.950" v="0" actId="729"/>
       <pc:docMkLst>
         <pc:docMk/>
       </pc:docMkLst>
-      <pc:sldChg chg="modSp mod">
-        <pc:chgData name="Antonio Cisternino" userId="ae5ff991-ed40-45cd-a3cc-046f9cb98081" providerId="ADAL" clId="{6FE36FCD-D04E-43A6-AA55-E1448BB1EDA6}" dt="2021-06-07T19:46:53.677" v="9" actId="20577"/>
+      <pc:sldChg chg="mod modShow">
+        <pc:chgData name="Antonio Cisternino" userId="ae5ff991-ed40-45cd-a3cc-046f9cb98081" providerId="ADAL" clId="{87B870CB-4B44-4065-800B-C8CFCDDC263F}" dt="2023-11-23T17:43:35.950" v="0" actId="729"/>
         <pc:sldMkLst>
           <pc:docMk/>
-          <pc:sldMk cId="1067257487" sldId="258"/>
+          <pc:sldMk cId="1227063927" sldId="257"/>
         </pc:sldMkLst>
-        <pc:spChg chg="mod">
-          <ac:chgData name="Antonio Cisternino" userId="ae5ff991-ed40-45cd-a3cc-046f9cb98081" providerId="ADAL" clId="{6FE36FCD-D04E-43A6-AA55-E1448BB1EDA6}" dt="2021-06-07T19:46:53.677" v="9" actId="20577"/>
-          <ac:spMkLst>
-            <pc:docMk/>
-            <pc:sldMk cId="1067257487" sldId="258"/>
-            <ac:spMk id="4" creationId="{36AC8173-C15B-4F9D-BF10-5149FD8D6072}"/>
-          </ac:spMkLst>
-        </pc:spChg>
       </pc:sldChg>
     </pc:docChg>
   </pc:docChgLst>
@@ -4031,7 +4023,7 @@
           <a:p>
             <a:fld id="{47CD793F-8AF7-4ED4-A89B-61A142DC6966}" type="datetimeFigureOut">
               <a:rPr lang="it-IT" smtClean="0"/>
-              <a:t>07/06/2021</a:t>
+              <a:t>22/11/2023</a:t>
             </a:fld>
             <a:endParaRPr lang="it-IT"/>
           </a:p>
@@ -4305,7 +4297,7 @@
           <a:p>
             <a:fld id="{47CD793F-8AF7-4ED4-A89B-61A142DC6966}" type="datetimeFigureOut">
               <a:rPr lang="it-IT" smtClean="0"/>
-              <a:t>07/06/2021</a:t>
+              <a:t>22/11/2023</a:t>
             </a:fld>
             <a:endParaRPr lang="it-IT"/>
           </a:p>
@@ -4569,7 +4561,7 @@
           <a:p>
             <a:fld id="{47CD793F-8AF7-4ED4-A89B-61A142DC6966}" type="datetimeFigureOut">
               <a:rPr lang="it-IT" smtClean="0"/>
-              <a:t>07/06/2021</a:t>
+              <a:t>22/11/2023</a:t>
             </a:fld>
             <a:endParaRPr lang="it-IT"/>
           </a:p>
@@ -5166,7 +5158,7 @@
           <a:p>
             <a:fld id="{47CD793F-8AF7-4ED4-A89B-61A142DC6966}" type="datetimeFigureOut">
               <a:rPr lang="it-IT" smtClean="0"/>
-              <a:t>07/06/2021</a:t>
+              <a:t>22/11/2023</a:t>
             </a:fld>
             <a:endParaRPr lang="it-IT"/>
           </a:p>
@@ -5681,7 +5673,7 @@
           <a:p>
             <a:fld id="{47CD793F-8AF7-4ED4-A89B-61A142DC6966}" type="datetimeFigureOut">
               <a:rPr lang="it-IT" smtClean="0"/>
-              <a:t>07/06/2021</a:t>
+              <a:t>22/11/2023</a:t>
             </a:fld>
             <a:endParaRPr lang="it-IT"/>
           </a:p>
@@ -5894,7 +5886,7 @@
           <a:p>
             <a:fld id="{47CD793F-8AF7-4ED4-A89B-61A142DC6966}" type="datetimeFigureOut">
               <a:rPr lang="it-IT" smtClean="0"/>
-              <a:t>07/06/2021</a:t>
+              <a:t>22/11/2023</a:t>
             </a:fld>
             <a:endParaRPr lang="it-IT"/>
           </a:p>
@@ -6085,7 +6077,7 @@
           <a:p>
             <a:fld id="{47CD793F-8AF7-4ED4-A89B-61A142DC6966}" type="datetimeFigureOut">
               <a:rPr lang="it-IT" smtClean="0"/>
-              <a:t>07/06/2021</a:t>
+              <a:t>22/11/2023</a:t>
             </a:fld>
             <a:endParaRPr lang="it-IT"/>
           </a:p>
@@ -6456,7 +6448,7 @@
           <a:p>
             <a:fld id="{47CD793F-8AF7-4ED4-A89B-61A142DC6966}" type="datetimeFigureOut">
               <a:rPr lang="it-IT" smtClean="0"/>
-              <a:t>07/06/2021</a:t>
+              <a:t>22/11/2023</a:t>
             </a:fld>
             <a:endParaRPr lang="it-IT"/>
           </a:p>
@@ -6807,7 +6799,7 @@
           <a:p>
             <a:fld id="{47CD793F-8AF7-4ED4-A89B-61A142DC6966}" type="datetimeFigureOut">
               <a:rPr lang="it-IT" smtClean="0"/>
-              <a:t>07/06/2021</a:t>
+              <a:t>22/11/2023</a:t>
             </a:fld>
             <a:endParaRPr lang="it-IT"/>
           </a:p>
@@ -10967,7 +10959,7 @@
 </file>
 
 <file path=ppt/slides/slide2.xml><?xml version="1.0" encoding="utf-8"?>
-<p:sld xmlns:a="http://schemas.openxmlformats.org/drawingml/2006/main" xmlns:r="http://schemas.openxmlformats.org/officeDocument/2006/relationships" xmlns:p="http://schemas.openxmlformats.org/presentationml/2006/main">
+<p:sld xmlns:a="http://schemas.openxmlformats.org/drawingml/2006/main" xmlns:r="http://schemas.openxmlformats.org/officeDocument/2006/relationships" xmlns:p="http://schemas.openxmlformats.org/presentationml/2006/main" show="0">
   <p:cSld>
     <p:spTree>
       <p:nvGrpSpPr>
@@ -11780,6 +11772,15 @@
 </file>
 
 <file path=customXml/item1.xml><?xml version="1.0" encoding="utf-8"?>
+<?mso-contentType ?>
+<FormTemplates xmlns="http://schemas.microsoft.com/sharepoint/v3/contenttype/forms">
+  <Display>DocumentLibraryForm</Display>
+  <Edit>DocumentLibraryForm</Edit>
+  <New>DocumentLibraryForm</New>
+</FormTemplates>
+</file>
+
+<file path=customXml/item2.xml><?xml version="1.0" encoding="utf-8"?>
 <p:properties xmlns:p="http://schemas.microsoft.com/office/2006/metadata/properties" xmlns:xsi="http://www.w3.org/2001/XMLSchema-instance" xmlns:pc="http://schemas.microsoft.com/office/infopath/2007/PartnerControls">
   <documentManagement>
     <NotebookType xmlns="eee456f4-f467-4261-8e1d-0b52910fccb4" xsi:nil="true"/>
@@ -11828,15 +11829,6 @@
     <Math_Settings xmlns="eee456f4-f467-4261-8e1d-0b52910fccb4" xsi:nil="true"/>
   </documentManagement>
 </p:properties>
-</file>
-
-<file path=customXml/item2.xml><?xml version="1.0" encoding="utf-8"?>
-<?mso-contentType ?>
-<FormTemplates xmlns="http://schemas.microsoft.com/sharepoint/v3/contenttype/forms">
-  <Display>DocumentLibraryForm</Display>
-  <Edit>DocumentLibraryForm</Edit>
-  <New>DocumentLibraryForm</New>
-</FormTemplates>
 </file>
 
 <file path=customXml/item3.xml><?xml version="1.0" encoding="utf-8"?>
@@ -12251,19 +12243,19 @@
 </file>
 
 <file path=customXml/itemProps1.xml><?xml version="1.0" encoding="utf-8"?>
+<ds:datastoreItem xmlns:ds="http://schemas.openxmlformats.org/officeDocument/2006/customXml" ds:itemID="{20C307AD-3B0A-4A7D-9519-2918460B17B9}">
+  <ds:schemaRefs>
+    <ds:schemaRef ds:uri="http://schemas.microsoft.com/sharepoint/v3/contenttype/forms"/>
+  </ds:schemaRefs>
+</ds:datastoreItem>
+</file>
+
+<file path=customXml/itemProps2.xml><?xml version="1.0" encoding="utf-8"?>
 <ds:datastoreItem xmlns:ds="http://schemas.openxmlformats.org/officeDocument/2006/customXml" ds:itemID="{F3FCB4AE-522D-44B1-8D63-6683158E80E8}">
   <ds:schemaRefs>
     <ds:schemaRef ds:uri="http://schemas.microsoft.com/office/2006/metadata/properties"/>
     <ds:schemaRef ds:uri="http://schemas.microsoft.com/office/infopath/2007/PartnerControls"/>
     <ds:schemaRef ds:uri="eee456f4-f467-4261-8e1d-0b52910fccb4"/>
-  </ds:schemaRefs>
-</ds:datastoreItem>
-</file>
-
-<file path=customXml/itemProps2.xml><?xml version="1.0" encoding="utf-8"?>
-<ds:datastoreItem xmlns:ds="http://schemas.openxmlformats.org/officeDocument/2006/customXml" ds:itemID="{20C307AD-3B0A-4A7D-9519-2918460B17B9}">
-  <ds:schemaRefs>
-    <ds:schemaRef ds:uri="http://schemas.microsoft.com/sharepoint/v3/contenttype/forms"/>
   </ds:schemaRefs>
 </ds:datastoreItem>
 </file>
